--- a/docs/Slide13_thermal_perturbation.pptx
+++ b/docs/Slide13_thermal_perturbation.pptx
@@ -1911,22 +1911,22 @@
       </p:pic>
       <p:pic xmlns:a="http://schemas.openxmlformats.org/drawingml/2006/main" xmlns:r="http://schemas.openxmlformats.org/officeDocument/2006/relationships">
         <p:nvPicPr>
-          <p:cNvPr id="40" name="Picture 39" descr="image.png"/>
+          <p:cNvPr id="40" name="Picture 39" descr="step5_anneal_gain.png"/>
           <p:cNvPicPr>
             <a:picLocks noChangeAspect="1"/>
           </p:cNvPicPr>
           <p:nvPr/>
         </p:nvPicPr>
         <p:blipFill>
-          <a:blip r:embed="rId3"/>
+          <a:blip r:embed="rId5"/>
           <a:stretch>
             <a:fillRect/>
           </a:stretch>
         </p:blipFill>
         <p:spPr>
           <a:xfrm>
-            <a:off x="4672583" y="2763374"/>
-            <a:ext cx="3968496" cy="1934754"/>
+            <a:off x="4672583" y="2785307"/>
+            <a:ext cx="3968496" cy="1890889"/>
           </a:xfrm>
           <a:prstGeom prst="rect">
             <a:avLst/>
